--- a/site/clases/parte-1-machine-learning-clasico/056-seleccion-y-entrenamiento-de-modelo/clase-056-seleccion-y-entrenamiento-de-modelo-presentacion.pptx
+++ b/site/clases/parte-1-machine-learning-clasico/056-seleccion-y-entrenamiento-de-modelo/clase-056-seleccion-y-entrenamiento-de-modelo-presentacion.pptx
@@ -3272,7 +3272,7 @@
                 </a:solidFill>
                 <a:latin typeface="Segoe UI"/>
               </a:rPr>
-              <a:t>Parte: 1 — Machine Learning Clásico · Fuente: Géron, cap. 2 § Select and Train a Model. · Duración estimada: 60 min.</a:t>
+              <a:t>Parte: 1 — Machine Learning Clásico · Fuente: Géron, cap. 2 § Select and Train a Model. · Duración estimada: 60 min. · Nivel: Intermedio</a:t>
             </a:r>
           </a:p>
         </p:txBody>
@@ -3362,7 +3362,7 @@
                 </a:solidFill>
                 <a:latin typeface="Segoe UI Semibold"/>
               </a:rPr>
-              <a:t>Que el alumno entrene varios modelos baseline sobre el pipeline ya preparado (California Housing), los compare con **cross-validation** en vez de un único split, identifique sub/overfitting con **learning curves**, y elija el candidato más prometedor para pasar a fine-tuning — sin malgastar tiempo afinando un modelo que no tiene techo.</a:t>
+              <a:t>Que el alumno entrene varios modelos baseline sobre un dataset de regresión (el notebook usa `load_diabetes` de scikit-learn, sin descargas), los compare con **cross-validation** en vez de un único split, identifique sub/overfitting con **learning curves**, y elija el candidato más prometedor para pasar a fine-tuning — sin malgastar tiempo afinando un modelo que no tiene techo.</a:t>
             </a:r>
           </a:p>
           <a:p>
@@ -3581,7 +3581,7 @@
                 </a:solidFill>
                 <a:latin typeface="Segoe UI"/>
               </a:rPr>
-              <a:t>Parte: 1 — Machine Learning Clásico · Fuente: Géron, cap. 2 § Select and Train a Model. · Duración estimada: 60 min.</a:t>
+              <a:t>Parte: 1 — Machine Learning Clásico · Fuente: Géron, cap. 2 § Select and Train a Model. · Duración estimada: 60 min. · Nivel: Intermedio</a:t>
             </a:r>
           </a:p>
         </p:txBody>
@@ -3713,7 +3713,7 @@
                 </a:solidFill>
                 <a:latin typeface="Segoe UI"/>
               </a:rPr>
-              <a:t>• Que el alumno entrene varios modelos baseline sobre el pipeline ya preparado (California Housing), los compare con cross-validation en vez de un único split, identifique sub/overfitting con learning curves, y elija el candidato más prometedor para pasar a fine-tuning — sin malgastar tiempo afinando un modelo que no tiene techo.</a:t>
+              <a:t>• Que el alumno entrene varios modelos baseline sobre un dataset de regresión (el notebook usa load_diabetes de scikit-learn, sin descargas), los compare con cross-validation en vez de un único split, identifique sub/overfitting con learning curves, y elija el candidato más prometedor para pasar a fine-tuning — sin malgastar tiempo afinando un modelo que no tiene techo.</a:t>
             </a:r>
           </a:p>
         </p:txBody>
@@ -4955,7 +4955,7 @@
                 </a:solidFill>
                 <a:latin typeface="Segoe UI"/>
               </a:rPr>
-              <a:t>Primer bloque ejecutable del notebook.</a:t>
+              <a:t>Entrenamos baselines, los comparamos con cross-validation (no un solo split), leemos learning curves para diagnosticar bias/varianza y elegimos el candidato para fine-tuning. Persistimos el ganador con joblib.</a:t>
             </a:r>
           </a:p>
         </p:txBody>
@@ -5042,7 +5042,273 @@
                 </a:solidFill>
                 <a:latin typeface="Courier New"/>
               </a:rPr>
-              <a:t># Imports y configuración inicial</a:t>
+              <a:t>import numpy as np</a:t>
+            </a:r>
+          </a:p>
+          <a:p>
+            <a:pPr>
+              <a:defRPr sz="1200" b="0">
+                <a:solidFill>
+                  <a:srgbClr val="F8FAFC"/>
+                </a:solidFill>
+                <a:latin typeface="Courier New"/>
+              </a:defRPr>
+            </a:pPr>
+            <a:r>
+              <a:rPr sz="1200" b="0">
+                <a:solidFill>
+                  <a:srgbClr val="F8FAFC"/>
+                </a:solidFill>
+                <a:latin typeface="Courier New"/>
+              </a:rPr>
+              <a:t>import pandas as pd</a:t>
+            </a:r>
+          </a:p>
+          <a:p>
+            <a:pPr>
+              <a:defRPr sz="1200" b="0">
+                <a:solidFill>
+                  <a:srgbClr val="F8FAFC"/>
+                </a:solidFill>
+                <a:latin typeface="Courier New"/>
+              </a:defRPr>
+            </a:pPr>
+            <a:r>
+              <a:rPr sz="1200" b="0">
+                <a:solidFill>
+                  <a:srgbClr val="F8FAFC"/>
+                </a:solidFill>
+                <a:latin typeface="Courier New"/>
+              </a:rPr>
+              <a:t>import time, joblib, tempfile, os</a:t>
+            </a:r>
+          </a:p>
+          <a:p>
+            <a:pPr>
+              <a:defRPr sz="1200" b="0">
+                <a:solidFill>
+                  <a:srgbClr val="F8FAFC"/>
+                </a:solidFill>
+                <a:latin typeface="Courier New"/>
+              </a:defRPr>
+            </a:pPr>
+            <a:r>
+              <a:rPr sz="1200" b="0">
+                <a:solidFill>
+                  <a:srgbClr val="F8FAFC"/>
+                </a:solidFill>
+                <a:latin typeface="Courier New"/>
+              </a:rPr>
+              <a:t>import matplotlib.pyplot as plt</a:t>
+            </a:r>
+          </a:p>
+          <a:p>
+            <a:pPr>
+              <a:defRPr sz="1200" b="0">
+                <a:solidFill>
+                  <a:srgbClr val="F8FAFC"/>
+                </a:solidFill>
+                <a:latin typeface="Courier New"/>
+              </a:defRPr>
+            </a:pPr>
+            <a:r>
+              <a:rPr sz="1200" b="0">
+                <a:solidFill>
+                  <a:srgbClr val="F8FAFC"/>
+                </a:solidFill>
+                <a:latin typeface="Courier New"/>
+              </a:rPr>
+              <a:t>from sklearn.datasets import load_diabetes</a:t>
+            </a:r>
+          </a:p>
+          <a:p>
+            <a:pPr>
+              <a:defRPr sz="1200" b="0">
+                <a:solidFill>
+                  <a:srgbClr val="F8FAFC"/>
+                </a:solidFill>
+                <a:latin typeface="Courier New"/>
+              </a:defRPr>
+            </a:pPr>
+            <a:r>
+              <a:rPr sz="1200" b="0">
+                <a:solidFill>
+                  <a:srgbClr val="F8FAFC"/>
+                </a:solidFill>
+                <a:latin typeface="Courier New"/>
+              </a:rPr>
+              <a:t>from sklearn.linear_model import LinearRegression</a:t>
+            </a:r>
+          </a:p>
+          <a:p>
+            <a:pPr>
+              <a:defRPr sz="1200" b="0">
+                <a:solidFill>
+                  <a:srgbClr val="F8FAFC"/>
+                </a:solidFill>
+                <a:latin typeface="Courier New"/>
+              </a:defRPr>
+            </a:pPr>
+            <a:r>
+              <a:rPr sz="1200" b="0">
+                <a:solidFill>
+                  <a:srgbClr val="F8FAFC"/>
+                </a:solidFill>
+                <a:latin typeface="Courier New"/>
+              </a:rPr>
+              <a:t>from sklearn.tree import DecisionTreeRegressor</a:t>
+            </a:r>
+          </a:p>
+          <a:p>
+            <a:pPr>
+              <a:defRPr sz="1200" b="0">
+                <a:solidFill>
+                  <a:srgbClr val="F8FAFC"/>
+                </a:solidFill>
+                <a:latin typeface="Courier New"/>
+              </a:defRPr>
+            </a:pPr>
+            <a:r>
+              <a:rPr sz="1200" b="0">
+                <a:solidFill>
+                  <a:srgbClr val="F8FAFC"/>
+                </a:solidFill>
+                <a:latin typeface="Courier New"/>
+              </a:rPr>
+              <a:t>from sklearn.ensemble import RandomForestRegressor</a:t>
+            </a:r>
+          </a:p>
+          <a:p>
+            <a:pPr>
+              <a:defRPr sz="1200" b="0">
+                <a:solidFill>
+                  <a:srgbClr val="F8FAFC"/>
+                </a:solidFill>
+                <a:latin typeface="Courier New"/>
+              </a:defRPr>
+            </a:pPr>
+            <a:r>
+              <a:rPr sz="1200" b="0">
+                <a:solidFill>
+                  <a:srgbClr val="F8FAFC"/>
+                </a:solidFill>
+                <a:latin typeface="Courier New"/>
+              </a:rPr>
+              <a:t>from sklearn.model_selection import cross_val_score, learning_curve</a:t>
+            </a:r>
+          </a:p>
+          <a:p>
+            <a:pPr>
+              <a:defRPr sz="1200" b="0">
+                <a:solidFill>
+                  <a:srgbClr val="F8FAFC"/>
+                </a:solidFill>
+                <a:latin typeface="Courier New"/>
+              </a:defRPr>
+            </a:pPr>
+            <a:r>
+              <a:rPr sz="1200" b="0">
+                <a:solidFill>
+                  <a:srgbClr val="F8FAFC"/>
+                </a:solidFill>
+                <a:latin typeface="Courier New"/>
+              </a:rPr>
+              <a:t>from sklearn.metrics import root_mean_squared_error</a:t>
+            </a:r>
+          </a:p>
+          <a:p>
+            <a:pPr>
+              <a:defRPr sz="1200" b="0">
+                <a:solidFill>
+                  <a:srgbClr val="F8FAFC"/>
+                </a:solidFill>
+                <a:latin typeface="Courier New"/>
+              </a:defRPr>
+            </a:pPr>
+            <a:r>
+              <a:rPr sz="1200" b="0">
+                <a:solidFill>
+                  <a:srgbClr val="F8FAFC"/>
+                </a:solidFill>
+                <a:latin typeface="Courier New"/>
+              </a:rPr>
+              <a:t> </a:t>
+            </a:r>
+          </a:p>
+          <a:p>
+            <a:pPr>
+              <a:defRPr sz="1200" b="0">
+                <a:solidFill>
+                  <a:srgbClr val="F8FAFC"/>
+                </a:solidFill>
+                <a:latin typeface="Courier New"/>
+              </a:defRPr>
+            </a:pPr>
+            <a:r>
+              <a:rPr sz="1200" b="0">
+                <a:solidFill>
+                  <a:srgbClr val="F8FAFC"/>
+                </a:solidFill>
+                <a:latin typeface="Courier New"/>
+              </a:rPr>
+              <a:t>np.random.seed(42)</a:t>
+            </a:r>
+          </a:p>
+          <a:p>
+            <a:pPr>
+              <a:defRPr sz="1200" b="0">
+                <a:solidFill>
+                  <a:srgbClr val="F8FAFC"/>
+                </a:solidFill>
+                <a:latin typeface="Courier New"/>
+              </a:defRPr>
+            </a:pPr>
+            <a:r>
+              <a:rPr sz="1200" b="0">
+                <a:solidFill>
+                  <a:srgbClr val="F8FAFC"/>
+                </a:solidFill>
+                <a:latin typeface="Courier New"/>
+              </a:rPr>
+              <a:t>data = load_diabetes()</a:t>
+            </a:r>
+          </a:p>
+          <a:p>
+            <a:pPr>
+              <a:defRPr sz="1200" b="0">
+                <a:solidFill>
+                  <a:srgbClr val="F8FAFC"/>
+                </a:solidFill>
+                <a:latin typeface="Courier New"/>
+              </a:defRPr>
+            </a:pPr>
+            <a:r>
+              <a:rPr sz="1200" b="0">
+                <a:solidFill>
+                  <a:srgbClr val="F8FAFC"/>
+                </a:solidFill>
+                <a:latin typeface="Courier New"/>
+              </a:rPr>
+              <a:t>X, y = data.data, data.target</a:t>
+            </a:r>
+          </a:p>
+          <a:p>
+            <a:pPr>
+              <a:defRPr sz="1200" b="0">
+                <a:solidFill>
+                  <a:srgbClr val="F8FAFC"/>
+                </a:solidFill>
+                <a:latin typeface="Courier New"/>
+              </a:defRPr>
+            </a:pPr>
+            <a:r>
+              <a:rPr sz="1200" b="0">
+                <a:solidFill>
+                  <a:srgbClr val="F8FAFC"/>
+                </a:solidFill>
+                <a:latin typeface="Courier New"/>
+              </a:rPr>
+              <a:t>print('diabetes:', X.shape, '| target rango', y.min(), '-', y.max())</a:t>
             </a:r>
           </a:p>
         </p:txBody>
